--- a/wavesplat/docs/labmeeting_2026-07-12.pptx
+++ b/wavesplat/docs/labmeeting_2026-07-12.pptx
@@ -30,6 +30,7 @@
     <p:sldId id="278" r:id="rId30"/>
     <p:sldId id="279" r:id="rId31"/>
     <p:sldId id="280" r:id="rId32"/>
+    <p:sldId id="281" r:id="rId33"/>
   </p:sldIdLst>
   <p:sldSz cx="12191695" cy="6858000" type="screen4x3"/>
   <p:notesSz cx="6858000" cy="9144000"/>
@@ -1647,6 +1648,76 @@
           <a:p>
             <a:r>
               <a:t>전부 사전등록 게이트라 원인·상금 수치화. 논문에선 독립 실패 목록이 아니라 승리의 경계 증명으로만 배치. 중심 문장이 '물리가 모르는 것만 채운다'인 이상, 못 이기는 곳의 증명이 논지의 절반.</a:t>
+            </a:r>
+          </a:p>
+        </p:txBody>
+      </p:sp>
+      <p:sp>
+        <p:nvSpPr>
+          <p:cNvPr id="4" name="Slide Number Placeholder 3"/>
+          <p:cNvSpPr>
+            <a:spLocks noGrp="1"/>
+          </p:cNvSpPr>
+          <p:nvPr>
+            <p:ph type="sldNum" idx="5" sz="quarter"/>
+          </p:nvPr>
+        </p:nvSpPr>
+        <p:spPr/>
+      </p:sp>
+    </p:spTree>
+  </p:cSld>
+  <p:clrMapOvr>
+    <a:masterClrMapping/>
+  </p:clrMapOvr>
+</p:notes>
+</file>
+
+<file path=ppt/notesSlides/notesSlide25.xml><?xml version="1.0" encoding="utf-8"?>
+<p:notes xmlns:a="http://schemas.openxmlformats.org/drawingml/2006/main" xmlns:p="http://schemas.openxmlformats.org/presentationml/2006/main" xmlns:r="http://schemas.openxmlformats.org/officeDocument/2006/relationships">
+  <p:cSld>
+    <p:spTree>
+      <p:nvGrpSpPr>
+        <p:cNvPr id="1" name=""/>
+        <p:cNvGrpSpPr/>
+        <p:nvPr/>
+      </p:nvGrpSpPr>
+      <p:grpSpPr>
+        <a:xfrm>
+          <a:off x="0" y="0"/>
+          <a:ext cx="0" cy="0"/>
+          <a:chOff x="0" y="0"/>
+          <a:chExt cx="0" cy="0"/>
+        </a:xfrm>
+      </p:grpSpPr>
+      <p:sp>
+        <p:nvSpPr>
+          <p:cNvPr id="2" name="Slide Image Placeholder 1"/>
+          <p:cNvSpPr>
+            <a:spLocks noGrp="1"/>
+          </p:cNvSpPr>
+          <p:nvPr>
+            <p:ph type="sldImg" idx="2"/>
+          </p:nvPr>
+        </p:nvSpPr>
+        <p:spPr/>
+      </p:sp>
+      <p:sp>
+        <p:nvSpPr>
+          <p:cNvPr id="3" name="Notes Placeholder 2"/>
+          <p:cNvSpPr>
+            <a:spLocks noGrp="1"/>
+          </p:cNvSpPr>
+          <p:nvPr>
+            <p:ph type="body" idx="3" sz="quarter"/>
+          </p:nvPr>
+        </p:nvSpPr>
+        <p:spPr/>
+        <p:txBody>
+          <a:bodyPr/>
+          <a:lstStyle/>
+          <a:p>
+            <a:r>
+              <a:t>짜집기 공격은 부품 목록으로는 사실이므로 부정하지 않는다. 방법 질문은 추정기(①)로 받는다 — WaveSplat은 우리가 설계·판정한 추정기이고 오늘의 학습·검증은 그 위의 두 번째 기여층. CNN은 γ-슬롯의 구현체일 뿐이며 슬롯 구조와 작동 조건(반대로 조립하면 죽음)이 우리 발견. 그래도 '새 네트워크'를 요구받으면 그것은 화법이 아니라 방법 축 승격(추정기 시스템 vs s2-head 학습 절)을 지도교수와 정할 실제 안건 — 요청 1(방향 승인)이 그 자리다.</a:t>
             </a:r>
           </a:p>
         </p:txBody>
@@ -9723,6 +9794,318 @@
                 <a:latin typeface="Malgun Gothic"/>
               </a:rPr>
               <a:t>• 못 이기는 곳의 증명이 중심 명제의 절반</a:t>
+            </a:r>
+          </a:p>
+        </p:txBody>
+      </p:sp>
+    </p:spTree>
+  </p:cSld>
+  <p:clrMapOvr>
+    <a:masterClrMapping/>
+  </p:clrMapOvr>
+</p:sld>
+</file>
+
+<file path=ppt/slides/slide26.xml><?xml version="1.0" encoding="utf-8"?>
+<p:sld xmlns:a="http://schemas.openxmlformats.org/drawingml/2006/main" xmlns:p="http://schemas.openxmlformats.org/presentationml/2006/main" xmlns:r="http://schemas.openxmlformats.org/officeDocument/2006/relationships">
+  <p:cSld>
+    <p:spTree>
+      <p:nvGrpSpPr>
+        <p:cNvPr id="1" name=""/>
+        <p:cNvGrpSpPr/>
+        <p:nvPr/>
+      </p:nvGrpSpPr>
+      <p:grpSpPr/>
+      <p:sp>
+        <p:nvSpPr>
+          <p:cNvPr id="2" name="Rectangle 1"/>
+          <p:cNvSpPr/>
+          <p:nvPr/>
+        </p:nvSpPr>
+        <p:spPr>
+          <a:xfrm>
+            <a:off x="0" y="0"/>
+            <a:ext cx="12191695" cy="146304"/>
+          </a:xfrm>
+          <a:prstGeom prst="rect">
+            <a:avLst/>
+          </a:prstGeom>
+          <a:solidFill>
+            <a:srgbClr val="888888"/>
+          </a:solidFill>
+          <a:ln>
+            <a:noFill/>
+          </a:ln>
+        </p:spPr>
+        <p:style>
+          <a:lnRef idx="1">
+            <a:schemeClr val="accent1"/>
+          </a:lnRef>
+          <a:fillRef idx="3">
+            <a:schemeClr val="accent1"/>
+          </a:fillRef>
+          <a:effectRef idx="2">
+            <a:schemeClr val="accent1"/>
+          </a:effectRef>
+          <a:fontRef idx="minor">
+            <a:schemeClr val="lt1"/>
+          </a:fontRef>
+        </p:style>
+        <p:txBody>
+          <a:bodyPr rtlCol="0" anchor="ctr"/>
+          <a:lstStyle/>
+          <a:p>
+            <a:pPr algn="ctr"/>
+          </a:p>
+        </p:txBody>
+      </p:sp>
+      <p:sp>
+        <p:nvSpPr>
+          <p:cNvPr id="3" name="TextBox 2"/>
+          <p:cNvSpPr txBox="1"/>
+          <p:nvPr/>
+        </p:nvSpPr>
+        <p:spPr>
+          <a:xfrm>
+            <a:off x="502920" y="292608"/>
+            <a:ext cx="10972800" cy="320040"/>
+          </a:xfrm>
+          <a:prstGeom prst="rect">
+            <a:avLst/>
+          </a:prstGeom>
+          <a:noFill/>
+        </p:spPr>
+        <p:txBody>
+          <a:bodyPr wrap="none">
+            <a:spAutoFit/>
+          </a:bodyPr>
+          <a:lstStyle/>
+          <a:p>
+            <a:r>
+              <a:rPr sz="1200" b="1" i="0">
+                <a:solidFill>
+                  <a:srgbClr val="0F9C7A"/>
+                </a:solidFill>
+                <a:latin typeface="Malgun Gothic"/>
+              </a:rPr>
+              <a:t>예비 슬라이드</a:t>
+            </a:r>
+          </a:p>
+        </p:txBody>
+      </p:sp>
+      <p:sp>
+        <p:nvSpPr>
+          <p:cNvPr id="4" name="TextBox 3"/>
+          <p:cNvSpPr txBox="1"/>
+          <p:nvPr/>
+        </p:nvSpPr>
+        <p:spPr>
+          <a:xfrm>
+            <a:off x="502920" y="603504"/>
+            <a:ext cx="11247120" cy="822960"/>
+          </a:xfrm>
+          <a:prstGeom prst="rect">
+            <a:avLst/>
+          </a:prstGeom>
+          <a:noFill/>
+        </p:spPr>
+        <p:txBody>
+          <a:bodyPr wrap="square">
+            <a:spAutoFit/>
+          </a:bodyPr>
+          <a:lstStyle/>
+          <a:p>
+            <a:r>
+              <a:rPr sz="2300" b="1" i="0">
+                <a:solidFill>
+                  <a:srgbClr val="1F2D5A"/>
+                </a:solidFill>
+                <a:latin typeface="Malgun Gothic"/>
+              </a:rPr>
+              <a:t>[예비] Q: 남의 방법을 모아 쓴 짜집기 아닌가 (방법론 정체성)</a:t>
+            </a:r>
+          </a:p>
+        </p:txBody>
+      </p:sp>
+      <p:sp>
+        <p:nvSpPr>
+          <p:cNvPr id="5" name="TextBox 4"/>
+          <p:cNvSpPr txBox="1"/>
+          <p:nvPr/>
+        </p:nvSpPr>
+        <p:spPr>
+          <a:xfrm>
+            <a:off x="502920" y="1554480"/>
+            <a:ext cx="11155680" cy="4846320"/>
+          </a:xfrm>
+          <a:prstGeom prst="rect">
+            <a:avLst/>
+          </a:prstGeom>
+          <a:noFill/>
+        </p:spPr>
+        <p:txBody>
+          <a:bodyPr wrap="square">
+            <a:spAutoFit/>
+          </a:bodyPr>
+          <a:lstStyle/>
+          <a:p>
+            <a:pPr>
+              <a:spcAft>
+                <a:spcPts val="600"/>
+              </a:spcAft>
+            </a:pPr>
+            <a:r>
+              <a:rPr sz="1500" b="1" i="0">
+                <a:solidFill>
+                  <a:srgbClr val="1F2D5A"/>
+                </a:solidFill>
+                <a:latin typeface="Malgun Gothic"/>
+              </a:rPr>
+              <a:t>• 인정할 것: 부품 단위(beamforming·MMSE·CNN)는 전부 인용 대상</a:t>
+            </a:r>
+          </a:p>
+          <a:p>
+            <a:pPr>
+              <a:spcAft>
+                <a:spcPts val="600"/>
+              </a:spcAft>
+            </a:pPr>
+            <a:r>
+              <a:rPr sz="1500" b="1" i="0">
+                <a:solidFill>
+                  <a:srgbClr val="1F2D5A"/>
+                </a:solidFill>
+                <a:latin typeface="Malgun Gothic"/>
+              </a:rPr>
+              <a:t>• ① 방법 축의 본체 = WaveSplat 추정기 (우리 설계)</a:t>
+            </a:r>
+          </a:p>
+          <a:p>
+            <a:pPr lvl="1">
+              <a:spcAft>
+                <a:spcPts val="600"/>
+              </a:spcAft>
+            </a:pPr>
+            <a:r>
+              <a:rPr sz="1350" b="0" i="0">
+                <a:solidFill>
+                  <a:srgbClr val="444444"/>
+                </a:solidFill>
+                <a:latin typeface="Malgun Gothic"/>
+              </a:rPr>
+              <a:t>   – 격자-없는 분산-구속 스펙트럴 추정 + 적응 성분 + 추적 모드</a:t>
+            </a:r>
+          </a:p>
+          <a:p>
+            <a:pPr lvl="1">
+              <a:spcAft>
+                <a:spcPts val="600"/>
+              </a:spcAft>
+            </a:pPr>
+            <a:r>
+              <a:rPr sz="1350" b="0" i="0">
+                <a:solidFill>
+                  <a:srgbClr val="444444"/>
+                </a:solidFill>
+                <a:latin typeface="Malgun Gothic"/>
+              </a:rPr>
+              <a:t>   – 판정된 우위: nRMSE 0.223 vs ETKF 0.319 vs GPR 0.276 (13.4 ms)</a:t>
+            </a:r>
+          </a:p>
+          <a:p>
+            <a:pPr lvl="1">
+              <a:spcAft>
+                <a:spcPts val="600"/>
+              </a:spcAft>
+            </a:pPr>
+            <a:r>
+              <a:rPr sz="1350" b="0" i="0">
+                <a:solidFill>
+                  <a:srgbClr val="444444"/>
+                </a:solidFill>
+                <a:latin typeface="Malgun Gothic"/>
+              </a:rPr>
+              <a:t>   – 7월 은행-MMSE·스트리밍(5 ms)·γ/σ 슬롯은 그 진화형</a:t>
+            </a:r>
+          </a:p>
+          <a:p>
+            <a:pPr>
+              <a:spcAft>
+                <a:spcPts val="600"/>
+              </a:spcAft>
+            </a:pPr>
+            <a:r>
+              <a:rPr sz="1500" b="1" i="0">
+                <a:solidFill>
+                  <a:srgbClr val="1F2D5A"/>
+                </a:solidFill>
+                <a:latin typeface="Malgun Gothic"/>
+              </a:rPr>
+              <a:t>• ② 조립 법칙도 방법 지식 — 아무 조합이나 작동하지 않음</a:t>
+            </a:r>
+          </a:p>
+          <a:p>
+            <a:pPr lvl="1">
+              <a:spcAft>
+                <a:spcPts val="600"/>
+              </a:spcAft>
+            </a:pPr>
+            <a:r>
+              <a:rPr sz="1350" b="0" i="0">
+                <a:solidFill>
+                  <a:srgbClr val="444444"/>
+                </a:solidFill>
+                <a:latin typeface="Malgun Gothic"/>
+              </a:rPr>
+              <a:t>   – "net은 prior만"+kp-정규화 은행 조합만 실측 zero-shot (도입 전 전패→8/8)</a:t>
+            </a:r>
+          </a:p>
+          <a:p>
+            <a:pPr lvl="1">
+              <a:spcAft>
+                <a:spcPts val="600"/>
+              </a:spcAft>
+            </a:pPr>
+            <a:r>
+              <a:rPr sz="1350" b="0" i="0">
+                <a:solidFill>
+                  <a:srgbClr val="444444"/>
+                </a:solidFill>
+                <a:latin typeface="Malgun Gothic"/>
+              </a:rPr>
+              <a:t>   – 잔차-선택은 실패(n-독약) → 미분가능 사후 관통 task-loss 바닥 헤드만 작동</a:t>
+            </a:r>
+          </a:p>
+          <a:p>
+            <a:pPr>
+              <a:spcAft>
+                <a:spcPts val="600"/>
+              </a:spcAft>
+            </a:pPr>
+            <a:r>
+              <a:rPr sz="1500" b="1" i="0">
+                <a:solidFill>
+                  <a:srgbClr val="1F2D5A"/>
+                </a:solidFill>
+                <a:latin typeface="Malgun Gothic"/>
+              </a:rPr>
+              <a:t>• ③ 그 위의 지식(법칙·지도)·자산(레시피·벤치마크)이 검증층</a:t>
+            </a:r>
+          </a:p>
+          <a:p>
+            <a:pPr>
+              <a:spcAft>
+                <a:spcPts val="600"/>
+              </a:spcAft>
+            </a:pPr>
+            <a:r>
+              <a:rPr sz="1500" b="0" i="0">
+                <a:solidFill>
+                  <a:srgbClr val="444444"/>
+                </a:solidFill>
+                <a:latin typeface="Malgun Gothic"/>
+              </a:rPr>
+              <a:t>• Kalman 필터의 부품도 가우스 수학 — 방법의 정체성은 조립 규칙과 보장</a:t>
             </a:r>
           </a:p>
         </p:txBody>

--- a/wavesplat/docs/labmeeting_2026-07-12.pptx
+++ b/wavesplat/docs/labmeeting_2026-07-12.pptx
@@ -1717,7 +1717,7 @@
           <a:lstStyle/>
           <a:p>
             <a:r>
-              <a:t>짜집기 공격은 부품 목록으로는 사실이므로 부정하지 않는다. 방법 질문은 추정기(①)로 받는다 — WaveSplat은 우리가 설계·판정한 추정기이고 오늘의 학습·검증은 그 위의 두 번째 기여층. CNN은 γ-슬롯의 구현체일 뿐이며 슬롯 구조와 작동 조건(반대로 조립하면 죽음)이 우리 발견. 그래도 '새 네트워크'를 요구받으면 그것은 화법이 아니라 방법 축 승격(추정기 시스템 vs s2-head 학습 절)을 지도교수와 정할 실제 안건 — 요청 1(방향 승인)이 그 자리다.</a:t>
+              <a:t>'학습 기반으로 변경'이 아님을 먼저 정정 — 전환은 2단계고 가운데(v2 은행-MMSE)가 무학습 물리이며 우리 설계다(무학습 레시피 0.96이 v2만으로 달성되는 게 증거). v1 한계는 남이 지적한 게 아니라 우리 병목 해부가 밝혔고 그 진단이 v2를 설계했다 — 사다리 전체가 방법론이고 각 단계에 판정 수치와 유효 영역이 있다. v1은 준단색 영역에서 여전히 승자(A-7 처방도 파라메트릭 폴리시 이식). 그래도 '새 네트워크' 요구가 오면 방법 축 승격 안건으로 격상 — 요청 1이 그 자리.</a:t>
             </a:r>
           </a:p>
         </p:txBody>
@@ -9922,7 +9922,7 @@
                 </a:solidFill>
                 <a:latin typeface="Malgun Gothic"/>
               </a:rPr>
-              <a:t>[예비] Q: 남의 방법을 모아 쓴 짜집기 아닌가 (방법론 정체성)</a:t>
+              <a:t>[예비] Q: 짜집기 아닌가 / WaveSplat은 한계 지적받고 버린 것 아닌가</a:t>
             </a:r>
           </a:p>
         </p:txBody>
@@ -9961,7 +9961,7 @@
                 </a:solidFill>
                 <a:latin typeface="Malgun Gothic"/>
               </a:rPr>
-              <a:t>• 인정할 것: 부품 단위(beamforming·MMSE·CNN)는 전부 인용 대상</a:t>
+              <a:t>• 인정: 부품 단위(beamforming·MMSE·CNN)는 전부 인용 대상</a:t>
             </a:r>
           </a:p>
           <a:p>
@@ -9977,7 +9977,7 @@
                 </a:solidFill>
                 <a:latin typeface="Malgun Gothic"/>
               </a:rPr>
-              <a:t>• ① 방법 축의 본체 = WaveSplat 추정기 (우리 설계)</a:t>
+              <a:t>• 방법론 = 추정기 계보(사다리) — 각 화살표에 우리 진단·판정이 붙음</a:t>
             </a:r>
           </a:p>
           <a:p>
@@ -9993,7 +9993,7 @@
                 </a:solidFill>
                 <a:latin typeface="Malgun Gothic"/>
               </a:rPr>
-              <a:t>   – 격자-없는 분산-구속 스펙트럴 추정 + 적응 성분 + 추적 모드</a:t>
+              <a:t>   – v1 파라메트릭 WaveSplat: 이산-성분 영역 승자 (1comp 0.44/0.63, OCEANS)</a:t>
             </a:r>
           </a:p>
           <a:p>
@@ -10009,7 +10009,7 @@
                 </a:solidFill>
                 <a:latin typeface="Malgun Gothic"/>
               </a:rPr>
-              <a:t>   – 판정된 우위: nRMSE 0.223 vs ETKF 0.319 vs GPR 0.276 (13.4 ms)</a:t>
+              <a:t>   – → 한계를 우리가 수치 진단(greedy 유령·모델차수·광대역 취약)</a:t>
             </a:r>
           </a:p>
           <a:p>
@@ -10025,7 +10025,23 @@
                 </a:solidFill>
                 <a:latin typeface="Malgun Gothic"/>
               </a:rPr>
-              <a:t>   – 7월 은행-MMSE·스트리밍(5 ms)·γ/σ 슬롯은 그 진화형</a:t>
+              <a:t>   – v2 은행-MMSE (무학습 물리, 우리 설계): 광대역·실측 강건 — 레시피 0.96</a:t>
+            </a:r>
+          </a:p>
+          <a:p>
+            <a:pPr lvl="1">
+              <a:spcAft>
+                <a:spcPts val="600"/>
+              </a:spcAft>
+            </a:pPr>
+            <a:r>
+              <a:rPr sz="1350" b="0" i="0">
+                <a:solidFill>
+                  <a:srgbClr val="444444"/>
+                </a:solidFill>
+                <a:latin typeface="Malgun Gothic"/>
+              </a:rPr>
+              <a:t>   – → 남은 갭(실측 오지정)을 또 진단 → v3 학습 슬롯(γ·σ)의 자리 확정</a:t>
             </a:r>
           </a:p>
           <a:p>
@@ -10041,39 +10057,7 @@
                 </a:solidFill>
                 <a:latin typeface="Malgun Gothic"/>
               </a:rPr>
-              <a:t>• ② 조립 법칙도 방법 지식 — 아무 조합이나 작동하지 않음</a:t>
-            </a:r>
-          </a:p>
-          <a:p>
-            <a:pPr lvl="1">
-              <a:spcAft>
-                <a:spcPts val="600"/>
-              </a:spcAft>
-            </a:pPr>
-            <a:r>
-              <a:rPr sz="1350" b="0" i="0">
-                <a:solidFill>
-                  <a:srgbClr val="444444"/>
-                </a:solidFill>
-                <a:latin typeface="Malgun Gothic"/>
-              </a:rPr>
-              <a:t>   – "net은 prior만"+kp-정규화 은행 조합만 실측 zero-shot (도입 전 전패→8/8)</a:t>
-            </a:r>
-          </a:p>
-          <a:p>
-            <a:pPr lvl="1">
-              <a:spcAft>
-                <a:spcPts val="600"/>
-              </a:spcAft>
-            </a:pPr>
-            <a:r>
-              <a:rPr sz="1350" b="0" i="0">
-                <a:solidFill>
-                  <a:srgbClr val="444444"/>
-                </a:solidFill>
-                <a:latin typeface="Malgun Gothic"/>
-              </a:rPr>
-              <a:t>   – 잔차-선택은 실패(n-독약) → 미분가능 사후 관통 task-loss 바닥 헤드만 작동</a:t>
+              <a:t>• v1은 폐기 아님 — 레짐 지도: 준단색→파라메트릭 / 광대역→은행 / 오지정→+학습</a:t>
             </a:r>
           </a:p>
           <a:p>
@@ -10089,7 +10073,7 @@
                 </a:solidFill>
                 <a:latin typeface="Malgun Gothic"/>
               </a:rPr>
-              <a:t>• ③ 그 위의 지식(법칙·지도)·자산(레시피·벤치마크)이 검증층</a:t>
+              <a:t>• 조립 법칙도 방법 지식: "net은 prior만"+kp-정규화만 zero-shot (반대 조립은 죽음)</a:t>
             </a:r>
           </a:p>
           <a:p>
@@ -10099,13 +10083,13 @@
               </a:spcAft>
             </a:pPr>
             <a:r>
-              <a:rPr sz="1500" b="0" i="0">
-                <a:solidFill>
-                  <a:srgbClr val="444444"/>
-                </a:solidFill>
-                <a:latin typeface="Malgun Gothic"/>
-              </a:rPr>
-              <a:t>• Kalman 필터의 부품도 가우스 수학 — 방법의 정체성은 조립 규칙과 보장</a:t>
+              <a:rPr sz="1500" b="1" i="0">
+                <a:solidFill>
+                  <a:srgbClr val="1F2D5A"/>
+                </a:solidFill>
+                <a:latin typeface="Malgun Gothic"/>
+              </a:rPr>
+              <a:t>• "한계 있었잖아" → "네, 그 정량 진단이 다음 설계를 만든 것이 기여입니다"</a:t>
             </a:r>
           </a:p>
         </p:txBody>
